--- a/GROUP 5 (1).pptx
+++ b/GROUP 5 (1).pptx
@@ -3988,7 +3988,7 @@
         <p:spPr>
           <a:xfrm rot="0">
             <a:off x="936611" y="5259044"/>
-            <a:ext cx="4761687" cy="2379346"/>
+            <a:ext cx="4761687" cy="1426846"/>
           </a:xfrm>
           <a:prstGeom prst="rect">
             <a:avLst/>
@@ -4018,27 +4018,6 @@
                 <a:sym typeface="Times New Roman Bold"/>
               </a:rPr>
               <a:t>IR Sensor : detects approaching vehicles</a:t>
-            </a:r>
-          </a:p>
-          <a:p>
-            <a:pPr algn="ctr" marL="582925" indent="-291463" lvl="1">
-              <a:lnSpc>
-                <a:spcPts val="3779"/>
-              </a:lnSpc>
-              <a:buFont typeface="Arial"/>
-              <a:buChar char="•"/>
-            </a:pPr>
-            <a:r>
-              <a:rPr lang="en-US" b="true" sz="2699">
-                <a:solidFill>
-                  <a:srgbClr val="FFFFFF"/>
-                </a:solidFill>
-                <a:latin typeface="Times New Roman Bold"/>
-                <a:ea typeface="Times New Roman Bold"/>
-                <a:cs typeface="Times New Roman Bold"/>
-                <a:sym typeface="Times New Roman Bold"/>
-              </a:rPr>
-              <a:t>LDR Sensor: detects ambient light conditions</a:t>
             </a:r>
           </a:p>
           <a:p>
